--- a/freelance/samples/pptx/Life_and_Works_of_Jose_Rizal_static.pptx
+++ b/freelance/samples/pptx/Life_and_Works_of_Jose_Rizal_static.pptx
@@ -4726,7 +4726,7 @@
       </p:sp>
       <p:pic>
         <p:nvPicPr>
-          <p:cNvPr id="3" name="!!Hero_Image" descr="rizal_closing.png"/>
+          <p:cNvPr id="3" name="!!Hero_Image" descr="rizal_hero.png"/>
           <p:cNvPicPr>
             <a:picLocks noChangeAspect="1"/>
           </p:cNvPicPr>
